--- a/Lecture slides/NYT C02 - Systematic Reviews.pptx
+++ b/Lecture slides/NYT C02 - Systematic Reviews.pptx
@@ -9637,7 +9637,7 @@
             </a:pPr>
             <a:r>
               <a:rPr lang="en"/>
-              <a:t>Dirk Riehle, Univ. Erlangen</a:t>
+              <a:t>Dirk Riehle, FAU Erlangen</a:t>
             </a:r>
             <a:endParaRPr/>
           </a:p>
@@ -10238,7 +10238,7 @@
             </a:pPr>
             <a:r>
               <a:rPr lang="en"/>
-              <a:t>Analyze data</a:t>
+              <a:t>Analyzing the data</a:t>
             </a:r>
             <a:endParaRPr/>
           </a:p>
@@ -15100,7 +15100,7 @@
             <a:tbl>
               <a:tblPr>
                 <a:noFill/>
-                <a:tableStyleId>{9CEC0C64-FEF3-4152-A805-9D5F9A160509}</a:tableStyleId>
+                <a:tableStyleId>{A41E8805-810A-4B07-9C4E-3CE2FA19FABC}</a:tableStyleId>
               </a:tblPr>
               <a:tblGrid>
                 <a:gridCol w="2926800"/>
@@ -21232,7 +21232,7 @@
             <a:tbl>
               <a:tblPr>
                 <a:noFill/>
-                <a:tableStyleId>{9CEC0C64-FEF3-4152-A805-9D5F9A160509}</a:tableStyleId>
+                <a:tableStyleId>{A41E8805-810A-4B07-9C4E-3CE2FA19FABC}</a:tableStyleId>
               </a:tblPr>
               <a:tblGrid>
                 <a:gridCol w="4297675"/>
